--- a/INT499 - Week 2 - Assignment 2 Part 1.pptx
+++ b/INT499 - Week 2 - Assignment 2 Part 1.pptx
@@ -1071,7 +1071,15 @@
           <a:p>
             <a:r>
               <a:rPr lang="en-US" dirty="0"/>
-              <a:t>The Gantt chart was created in </a:t>
+              <a:t>The Gantt chart for the </a:t>
+            </a:r>
+            <a:r>
+              <a:rPr lang="en-US" dirty="0" err="1"/>
+              <a:t>StreamList</a:t>
+            </a:r>
+            <a:r>
+              <a:rPr lang="en-US" dirty="0"/>
+              <a:t> project was created using </a:t>
             </a:r>
             <a:r>
               <a:rPr lang="en-US" dirty="0" err="1"/>
@@ -1079,7 +1087,7 @@
             </a:r>
             <a:r>
               <a:rPr lang="en-US" dirty="0"/>
-              <a:t> to organize the development tasks for the </a:t>
+              <a:t> to plan the development schedule. Each task in the chart was derived from the functional requirements defined in the Software Requirements Specification, including user account management, movie search functionality, </a:t>
             </a:r>
             <a:r>
               <a:rPr lang="en-US" dirty="0" err="1"/>
@@ -1087,43 +1095,36 @@
             </a:r>
             <a:r>
               <a:rPr lang="en-US" dirty="0"/>
-              <a:t> application. Each task was derived from the functional requirements listed in the Software Requirements Specification.</a:t>
-            </a:r>
-          </a:p>
-          <a:p>
-            <a:endParaRPr lang="en-US" dirty="0"/>
+              <a:t> list management, subscription management, and payment processing. </a:t>
+            </a:r>
           </a:p>
           <a:p>
             <a:r>
               <a:rPr lang="en-US" dirty="0"/>
-              <a:t>The project begins with planning and system design, including defining the application structure and creating the wireframes. Once the design phase is complete, development tasks are organized around the core system components such as user account management, movie search functionality, </a:t>
-            </a:r>
-            <a:r>
-              <a:rPr lang="en-US" dirty="0" err="1"/>
-              <a:t>StreamList</a:t>
-            </a:r>
+              <a:t>The tasks are arranged in the order they must be completed. Foundational tasks such as project setup, application structure, and routing are completed first. Once the base application framework is established, development tasks such as UI components, movie search features, and shopping cart functionality can be developed concurrently.</a:t>
+            </a:r>
+            <a:endParaRPr lang="en-US" dirty="0">
+              <a:ea typeface="Calibri"/>
+              <a:cs typeface="Calibri"/>
+            </a:endParaRPr>
+          </a:p>
+          <a:p>
             <a:r>
               <a:rPr lang="en-US" dirty="0"/>
-              <a:t> list management, and shopping cart features.</a:t>
-            </a:r>
-          </a:p>
-          <a:p>
-            <a:endParaRPr lang="en-US" dirty="0"/>
-          </a:p>
-          <a:p>
-            <a:r>
-              <a:rPr lang="en-US" dirty="0"/>
-              <a:t>Tasks are sequenced so that foundational components such as project setup and routing are completed first. Other tasks, such as UI development and feature implementation, can be developed concurrently once the base application framework is established.</a:t>
-            </a:r>
-          </a:p>
-          <a:p>
-            <a:endParaRPr lang="en-US" dirty="0"/>
-          </a:p>
-          <a:p>
-            <a:r>
-              <a:rPr lang="en-US" dirty="0"/>
-              <a:t>Milestones are included in the project schedule to represent key deliverables such as design completion, feature implementation, testing, and final project delivery.</a:t>
-            </a:r>
+              <a:t>Each task includes a time estimate to provide a realistic timeline for development. Milestones are also included to represent major deliverables such as completion of the application structure, feature implementation, testing, and final project delivery.</a:t>
+            </a:r>
+            <a:endParaRPr lang="en-US" dirty="0">
+              <a:ea typeface="Calibri"/>
+              <a:cs typeface="Calibri"/>
+            </a:endParaRPr>
+          </a:p>
+          <a:p>
+            <a:endParaRPr lang="en-US" dirty="0">
+              <a:ea typeface="Calibri"/>
+              <a:cs typeface="Calibri"/>
+            </a:endParaRPr>
+          </a:p>
+          <a:p>
             <a:endParaRPr lang="en-US" dirty="0">
               <a:ea typeface="Calibri"/>
               <a:cs typeface="Calibri"/>
@@ -1231,7 +1232,7 @@
           <a:p>
             <a:r>
               <a:rPr lang="en-US" dirty="0"/>
-              <a:t>The wireframe represents a simplified layout of the </a:t>
+              <a:t>The wireframe illustrates the structure of the </a:t>
             </a:r>
             <a:r>
               <a:rPr lang="en-US" dirty="0" err="1"/>
@@ -1239,16 +1240,13 @@
             </a:r>
             <a:r>
               <a:rPr lang="en-US" dirty="0"/>
-              <a:t> user interface. The purpose of the wireframe is to show the structure of the application without focusing on visual design details.</a:t>
-            </a:r>
-          </a:p>
-          <a:p>
-            <a:endParaRPr lang="en-US" dirty="0"/>
+              <a:t> user interface. The purpose of the wireframe is to provide a skeletal layout of the application without focusing on design details such as colors or styling.</a:t>
+            </a:r>
           </a:p>
           <a:p>
             <a:r>
               <a:rPr lang="en-US" dirty="0"/>
-              <a:t>At the top of the interface is a navigation bar that allows users to move between the four main pages of the application: the </a:t>
+              <a:t>The top navigation menu allows users to move between the four primary sections of the application: the </a:t>
             </a:r>
             <a:r>
               <a:rPr lang="en-US" dirty="0" err="1"/>
@@ -1256,59 +1254,41 @@
             </a:r>
             <a:r>
               <a:rPr lang="en-US" dirty="0"/>
-              <a:t> homepage, the Movies page, the Cart page, and the About page. These pages correspond to the navigation requirements identified in the system specification.</a:t>
-            </a:r>
-          </a:p>
-          <a:p>
-            <a:endParaRPr lang="en-US" dirty="0"/>
-          </a:p>
-          <a:p>
-            <a:r>
-              <a:rPr lang="en-US" dirty="0"/>
-              <a:t>The homepage contains controls that allow the user to manage their movie lists. This includes entering new movies, tracking items that the user plans to watch, and marking movies as completed.</a:t>
-            </a:r>
-          </a:p>
-          <a:p>
-            <a:endParaRPr lang="en-US" dirty="0"/>
-          </a:p>
-          <a:p>
-            <a:r>
-              <a:rPr lang="en-US"/>
-              <a:t>The Movies page will eventually allow users to browse and search movies by genre, view similar recommendations, and see movie ratings.</a:t>
-            </a:r>
-          </a:p>
-          <a:p>
-            <a:endParaRPr lang="en-US" dirty="0"/>
-          </a:p>
-          <a:p>
-            <a:r>
-              <a:rPr lang="en-US" dirty="0"/>
-              <a:t>The Cart page contains functions related to account services, including subscription management, saved payment methods, billing information, and purchase history.</a:t>
-            </a:r>
-          </a:p>
-          <a:p>
-            <a:endParaRPr lang="en-US" dirty="0"/>
-          </a:p>
-          <a:p>
-            <a:r>
-              <a:rPr lang="en-US"/>
-              <a:t>The About page provides information about the company, including the mission statement, contact information, and links to social media or employment opportunities.</a:t>
-            </a:r>
-          </a:p>
-          <a:p>
-            <a:endParaRPr lang="en-US" dirty="0"/>
-          </a:p>
-          <a:p>
-            <a:r>
-              <a:rPr lang="en-US" dirty="0"/>
-              <a:t>This wireframe reflects the component-based design approach used in React, where each page can be implemented as a separate component connected through React Router navigation.</a:t>
-            </a:r>
-          </a:p>
-          <a:p>
+              <a:t> homepage, the Movies page, the Cart page, and the About page.</a:t>
+            </a:r>
             <a:endParaRPr lang="en-US" dirty="0">
               <a:ea typeface="Calibri"/>
               <a:cs typeface="Calibri"/>
             </a:endParaRPr>
+          </a:p>
+          <a:p>
+            <a:r>
+              <a:rPr lang="en-US" dirty="0"/>
+              <a:t>Each page contains buttons representing the main functional elements of the application. For example, the homepage allows users to enter movie titles and manage lists such as movies to watch or movies already completed. The Movies page will allow users to browse films by genre, find similar movies, and view ratings. The Cart page supports subscription management and billing information, while the About page contains company information and contact details.</a:t>
+            </a:r>
+            <a:endParaRPr lang="en-US" dirty="0">
+              <a:ea typeface="Calibri"/>
+              <a:cs typeface="Calibri"/>
+            </a:endParaRPr>
+          </a:p>
+          <a:p>
+            <a:r>
+              <a:rPr lang="en-US" dirty="0"/>
+              <a:t>The wireframe reflects the component-based structure used in React, where each page will be implemented as an individual component connected through React Router navigation.</a:t>
+            </a:r>
+            <a:endParaRPr lang="en-US" dirty="0">
+              <a:ea typeface="Calibri"/>
+              <a:cs typeface="Calibri"/>
+            </a:endParaRPr>
+          </a:p>
+          <a:p>
+            <a:endParaRPr lang="en-US" dirty="0">
+              <a:ea typeface="Calibri"/>
+              <a:cs typeface="Calibri"/>
+            </a:endParaRPr>
+          </a:p>
+          <a:p>
+            <a:endParaRPr lang="en-US" dirty="0"/>
           </a:p>
         </p:txBody>
       </p:sp>
@@ -12337,6 +12317,15 @@
 </file>
 
 <file path=customXml/item1.xml><?xml version="1.0" encoding="utf-8"?>
+<?mso-contentType ?>
+<FormTemplates xmlns="http://schemas.microsoft.com/sharepoint/v3/contenttype/forms">
+  <Display>DocumentLibraryForm</Display>
+  <Edit>DocumentLibraryForm</Edit>
+  <New>DocumentLibraryForm</New>
+</FormTemplates>
+</file>
+
+<file path=customXml/item2.xml><?xml version="1.0" encoding="utf-8"?>
 <ct:contentTypeSchema xmlns:ct="http://schemas.microsoft.com/office/2006/metadata/contentType" xmlns:ma="http://schemas.microsoft.com/office/2006/metadata/properties/metaAttributes" ct:_="" ma:_="" ma:contentTypeName="Document" ma:contentTypeID="0x01010079F111ED35F8CC479449609E8A0923A6" ma:contentTypeVersion="24" ma:contentTypeDescription="Create a new document." ma:contentTypeScope="" ma:versionID="2d714a3296df14eba7a100bb665443ca">
   <xsd:schema xmlns:xsd="http://www.w3.org/2001/XMLSchema" xmlns:xs="http://www.w3.org/2001/XMLSchema" xmlns:p="http://schemas.microsoft.com/office/2006/metadata/properties" xmlns:ns1="http://schemas.microsoft.com/sharepoint/v3" xmlns:ns2="71af3243-3dd4-4a8d-8c0d-dd76da1f02a5" xmlns:ns3="16c05727-aa75-4e4a-9b5f-8a80a1165891" xmlns:ns4="230e9df3-be65-4c73-a93b-d1236ebd677e" targetNamespace="http://schemas.microsoft.com/office/2006/metadata/properties" ma:root="true" ma:fieldsID="49549bf45bfbbfb6cffed527380e77e1" ns1:_="" ns2:_="" ns3:_="" ns4:_="">
     <xsd:import namespace="http://schemas.microsoft.com/sharepoint/v3"/>
@@ -12624,15 +12613,6 @@
 </ct:contentTypeSchema>
 </file>
 
-<file path=customXml/item2.xml><?xml version="1.0" encoding="utf-8"?>
-<?mso-contentType ?>
-<FormTemplates xmlns="http://schemas.microsoft.com/sharepoint/v3/contenttype/forms">
-  <Display>DocumentLibraryForm</Display>
-  <Edit>DocumentLibraryForm</Edit>
-  <New>DocumentLibraryForm</New>
-</FormTemplates>
-</file>
-
 <file path=customXml/item3.xml><?xml version="1.0" encoding="utf-8"?>
 <p:properties xmlns:p="http://schemas.microsoft.com/office/2006/metadata/properties" xmlns:xsi="http://www.w3.org/2001/XMLSchema-instance" xmlns:pc="http://schemas.microsoft.com/office/infopath/2007/PartnerControls">
   <documentManagement>
@@ -12654,6 +12634,14 @@
 </file>
 
 <file path=customXml/itemProps1.xml><?xml version="1.0" encoding="utf-8"?>
+<ds:datastoreItem xmlns:ds="http://schemas.openxmlformats.org/officeDocument/2006/customXml" ds:itemID="{25B4CAA5-BE7A-46AB-97ED-63B24C46A3A8}">
+  <ds:schemaRefs>
+    <ds:schemaRef ds:uri="http://schemas.microsoft.com/sharepoint/v3/contenttype/forms"/>
+  </ds:schemaRefs>
+</ds:datastoreItem>
+</file>
+
+<file path=customXml/itemProps2.xml><?xml version="1.0" encoding="utf-8"?>
 <ds:datastoreItem xmlns:ds="http://schemas.openxmlformats.org/officeDocument/2006/customXml" ds:itemID="{5783CE7D-BFC6-4030-A335-E7F88DB66414}">
   <ds:schemaRefs>
     <ds:schemaRef ds:uri="http://schemas.microsoft.com/office/2006/metadata/contentType"/>
@@ -12674,22 +12662,21 @@
 </ds:datastoreItem>
 </file>
 
-<file path=customXml/itemProps2.xml><?xml version="1.0" encoding="utf-8"?>
-<ds:datastoreItem xmlns:ds="http://schemas.openxmlformats.org/officeDocument/2006/customXml" ds:itemID="{25B4CAA5-BE7A-46AB-97ED-63B24C46A3A8}">
-  <ds:schemaRefs>
-    <ds:schemaRef ds:uri="http://schemas.microsoft.com/sharepoint/v3/contenttype/forms"/>
-  </ds:schemaRefs>
-</ds:datastoreItem>
-</file>
-
 <file path=customXml/itemProps3.xml><?xml version="1.0" encoding="utf-8"?>
 <ds:datastoreItem xmlns:ds="http://schemas.openxmlformats.org/officeDocument/2006/customXml" ds:itemID="{411F98F7-6576-47F1-AD63-56E26C339747}">
   <ds:schemaRefs>
+    <ds:schemaRef ds:uri="16c05727-aa75-4e4a-9b5f-8a80a1165891"/>
+    <ds:schemaRef ds:uri="230e9df3-be65-4c73-a93b-d1236ebd677e"/>
+    <ds:schemaRef ds:uri="71af3243-3dd4-4a8d-8c0d-dd76da1f02a5"/>
+    <ds:schemaRef ds:uri="http://purl.org/dc/dcmitype/"/>
+    <ds:schemaRef ds:uri="http://purl.org/dc/elements/1.1/"/>
+    <ds:schemaRef ds:uri="http://purl.org/dc/terms/"/>
+    <ds:schemaRef ds:uri="http://schemas.microsoft.com/office/2006/documentManagement/types"/>
     <ds:schemaRef ds:uri="http://schemas.microsoft.com/office/2006/metadata/properties"/>
     <ds:schemaRef ds:uri="http://schemas.microsoft.com/office/infopath/2007/PartnerControls"/>
     <ds:schemaRef ds:uri="http://schemas.microsoft.com/sharepoint/v3"/>
-    <ds:schemaRef ds:uri="71af3243-3dd4-4a8d-8c0d-dd76da1f02a5"/>
-    <ds:schemaRef ds:uri="230e9df3-be65-4c73-a93b-d1236ebd677e"/>
+    <ds:schemaRef ds:uri="http://schemas.openxmlformats.org/package/2006/metadata/core-properties"/>
+    <ds:schemaRef ds:uri="http://www.w3.org/XML/1998/namespace"/>
   </ds:schemaRefs>
 </ds:datastoreItem>
 </file>
